--- a/fase 1/ServiciosYa_Fase1__Pablo_Vargas_.pptx
+++ b/fase 1/ServiciosYa_Fase1__Pablo_Vargas_.pptx
@@ -24024,8 +24024,8 @@
         </p:nvSpPr>
         <p:spPr>
           <a:xfrm>
-            <a:off x="731520" y="1143000"/>
-            <a:ext cx="7680960" cy="411480"/>
+            <a:off x="685800" y="1143000"/>
+            <a:ext cx="8046720" cy="502920"/>
           </a:xfrm>
           <a:prstGeom prst="rect">
             <a:avLst/>
@@ -24037,975 +24037,334 @@
         </p:spPr>
         <p:txBody>
           <a:bodyPr wrap="square" lIns="73152" tIns="73152" rIns="73152" bIns="73152">
+            <a:normAutofit/>
+          </a:bodyPr>
+          <a:lstStyle/>
+          <a:p>
+            <a:r>
+              <a:rPr sz="2400" b="1">
+                <a:solidFill>
+                  <a:srgbClr val="1F4E79"/>
+                </a:solidFill>
+              </a:rPr>
+              <a:t>ServiciosYa – Plataforma de conexión y gestión de servicios</a:t>
+            </a:r>
+          </a:p>
+        </p:txBody>
+      </p:sp>
+      <p:sp>
+        <p:nvSpPr>
+          <p:cNvPr id="4" name="Rounded Rectangle 3"/>
+          <p:cNvSpPr/>
+          <p:nvPr/>
+        </p:nvSpPr>
+        <p:spPr>
+          <a:xfrm>
+            <a:off x="685800" y="2057400"/>
+            <a:ext cx="3977639" cy="1691640"/>
+          </a:xfrm>
+          <a:prstGeom prst="roundRect">
+            <a:avLst/>
+          </a:prstGeom>
+          <a:solidFill>
+            <a:srgbClr val="F5F7FA"/>
+          </a:solidFill>
+          <a:ln w="12700">
+            <a:solidFill>
+              <a:srgbClr val="D2D8E1"/>
+            </a:solidFill>
+          </a:ln>
+        </p:spPr>
+        <p:style>
+          <a:lnRef idx="1">
+            <a:schemeClr val="accent1"/>
+          </a:lnRef>
+          <a:fillRef idx="3">
+            <a:schemeClr val="accent1"/>
+          </a:fillRef>
+          <a:effectRef idx="2">
+            <a:schemeClr val="accent1"/>
+          </a:effectRef>
+          <a:fontRef idx="minor">
+            <a:schemeClr val="lt1"/>
+          </a:fontRef>
+        </p:style>
+        <p:txBody>
+          <a:bodyPr rtlCol="0" anchor="ctr" wrap="square" lIns="164592" rIns="164592" tIns="109728" bIns="91440">
+            <a:normAutofit/>
+          </a:bodyPr>
+          <a:lstStyle/>
+          <a:p>
+            <a:pPr algn="ctr">
+              <a:spcAft>
+                <a:spcPts val="400"/>
+              </a:spcAft>
+              <a:defRPr sz="1800" b="1">
+                <a:solidFill>
+                  <a:srgbClr val="1F4E79"/>
+                </a:solidFill>
+              </a:defRPr>
+            </a:pPr>
+            <a:r>
+              <a:t>Problema</a:t>
+            </a:r>
+          </a:p>
+          <a:p>
+            <a:pPr algn="l">
+              <a:spcAft>
+                <a:spcPts val="300"/>
+              </a:spcAft>
+              <a:defRPr sz="1420">
+                <a:solidFill>
+                  <a:srgbClr val="000000"/>
+                </a:solidFill>
+              </a:defRPr>
+            </a:pPr>
+            <a:r>
+              <a:t>• Los servicios se gestionan informalmente por redes sociales, grupos de mensajería o recomendaciones.</a:t>
+            </a:r>
+          </a:p>
+          <a:p>
+            <a:pPr algn="l">
+              <a:spcAft>
+                <a:spcPts val="300"/>
+              </a:spcAft>
+              <a:defRPr sz="1420">
+                <a:solidFill>
+                  <a:srgbClr val="000000"/>
+                </a:solidFill>
+              </a:defRPr>
+            </a:pPr>
+            <a:r>
+              <a:t>• Esto dificulta ordenar solicitudes, comparar postulantes y realizar seguimiento.</a:t>
+            </a:r>
+          </a:p>
+        </p:txBody>
+      </p:sp>
+      <p:sp>
+        <p:nvSpPr>
+          <p:cNvPr id="5" name="Rounded Rectangle 4"/>
+          <p:cNvSpPr/>
+          <p:nvPr/>
+        </p:nvSpPr>
+        <p:spPr>
+          <a:xfrm>
+            <a:off x="685800" y="4069080"/>
+            <a:ext cx="3977639" cy="1234440"/>
+          </a:xfrm>
+          <a:prstGeom prst="roundRect">
+            <a:avLst/>
+          </a:prstGeom>
+          <a:solidFill>
+            <a:srgbClr val="F5F7FA"/>
+          </a:solidFill>
+          <a:ln w="12700">
+            <a:solidFill>
+              <a:srgbClr val="D2D8E1"/>
+            </a:solidFill>
+          </a:ln>
+        </p:spPr>
+        <p:style>
+          <a:lnRef idx="1">
+            <a:schemeClr val="accent1"/>
+          </a:lnRef>
+          <a:fillRef idx="3">
+            <a:schemeClr val="accent1"/>
+          </a:fillRef>
+          <a:effectRef idx="2">
+            <a:schemeClr val="accent1"/>
+          </a:effectRef>
+          <a:fontRef idx="minor">
+            <a:schemeClr val="lt1"/>
+          </a:fontRef>
+        </p:style>
+        <p:txBody>
+          <a:bodyPr rtlCol="0" anchor="ctr" wrap="square" lIns="164592" rIns="164592" tIns="109728" bIns="91440">
+            <a:normAutofit/>
+          </a:bodyPr>
+          <a:lstStyle/>
+          <a:p>
+            <a:pPr algn="ctr">
+              <a:spcAft>
+                <a:spcPts val="400"/>
+              </a:spcAft>
+              <a:defRPr sz="1800" b="1">
+                <a:solidFill>
+                  <a:srgbClr val="1F4E79"/>
+                </a:solidFill>
+              </a:defRPr>
+            </a:pPr>
+            <a:r>
+              <a:t>Solución propuesta</a:t>
+            </a:r>
+          </a:p>
+          <a:p>
+            <a:pPr algn="l">
+              <a:spcAft>
+                <a:spcPts val="300"/>
+              </a:spcAft>
+              <a:defRPr sz="1420">
+                <a:solidFill>
+                  <a:srgbClr val="000000"/>
+                </a:solidFill>
+              </a:defRPr>
+            </a:pPr>
+            <a:r>
+              <a:t>• ServiciosYa conectará a solicitantes de servicios con usuarios interesados en ejecutarlos.</a:t>
+            </a:r>
+          </a:p>
+        </p:txBody>
+      </p:sp>
+      <p:sp>
+        <p:nvSpPr>
+          <p:cNvPr id="6" name="Rounded Rectangle 5"/>
+          <p:cNvSpPr/>
+          <p:nvPr/>
+        </p:nvSpPr>
+        <p:spPr>
+          <a:xfrm>
+            <a:off x="4983480" y="2057400"/>
+            <a:ext cx="4160520" cy="3246120"/>
+          </a:xfrm>
+          <a:prstGeom prst="roundRect">
+            <a:avLst/>
+          </a:prstGeom>
+          <a:solidFill>
+            <a:srgbClr val="F5F7FA"/>
+          </a:solidFill>
+          <a:ln w="12700">
+            <a:solidFill>
+              <a:srgbClr val="D2D8E1"/>
+            </a:solidFill>
+          </a:ln>
+        </p:spPr>
+        <p:style>
+          <a:lnRef idx="1">
+            <a:schemeClr val="accent1"/>
+          </a:lnRef>
+          <a:fillRef idx="3">
+            <a:schemeClr val="accent1"/>
+          </a:fillRef>
+          <a:effectRef idx="2">
+            <a:schemeClr val="accent1"/>
+          </a:effectRef>
+          <a:fontRef idx="minor">
+            <a:schemeClr val="lt1"/>
+          </a:fontRef>
+        </p:style>
+        <p:txBody>
+          <a:bodyPr rtlCol="0" anchor="ctr" wrap="square" lIns="164592" rIns="164592" tIns="109728" bIns="91440">
+            <a:normAutofit/>
+          </a:bodyPr>
+          <a:lstStyle/>
+          <a:p>
+            <a:pPr algn="ctr">
+              <a:spcAft>
+                <a:spcPts val="400"/>
+              </a:spcAft>
+              <a:defRPr sz="1800" b="1">
+                <a:solidFill>
+                  <a:srgbClr val="1F4E79"/>
+                </a:solidFill>
+              </a:defRPr>
+            </a:pPr>
+            <a:r>
+              <a:t>Funcionalidades principales</a:t>
+            </a:r>
+          </a:p>
+          <a:p>
+            <a:pPr algn="l">
+              <a:spcAft>
+                <a:spcPts val="300"/>
+              </a:spcAft>
+              <a:defRPr sz="1420">
+                <a:solidFill>
+                  <a:srgbClr val="000000"/>
+                </a:solidFill>
+              </a:defRPr>
+            </a:pPr>
+            <a:r>
+              <a:t>• Registro, inicio de sesión y gestión de perfiles.</a:t>
+            </a:r>
+          </a:p>
+          <a:p>
+            <a:pPr algn="l">
+              <a:spcAft>
+                <a:spcPts val="300"/>
+              </a:spcAft>
+              <a:defRPr sz="1420">
+                <a:solidFill>
+                  <a:srgbClr val="000000"/>
+                </a:solidFill>
+              </a:defRPr>
+            </a:pPr>
+            <a:r>
+              <a:t>• Publicación de solicitudes, búsqueda de oportunidades y postulación.</a:t>
+            </a:r>
+          </a:p>
+          <a:p>
+            <a:pPr algn="l">
+              <a:spcAft>
+                <a:spcPts val="300"/>
+              </a:spcAft>
+              <a:defRPr sz="1420">
+                <a:solidFill>
+                  <a:srgbClr val="000000"/>
+                </a:solidFill>
+              </a:defRPr>
+            </a:pPr>
+            <a:r>
+              <a:t>• Revisión de postulaciones, selección de usuario y seguimiento del servicio.</a:t>
+            </a:r>
+          </a:p>
+          <a:p>
+            <a:pPr algn="l">
+              <a:spcAft>
+                <a:spcPts val="300"/>
+              </a:spcAft>
+              <a:defRPr sz="1420">
+                <a:solidFill>
+                  <a:srgbClr val="000000"/>
+                </a:solidFill>
+              </a:defRPr>
+            </a:pPr>
+            <a:r>
+              <a:t>• Calificaciones, comentarios, app móvil, plataforma web, backend y base de datos centralizada.</a:t>
+            </a:r>
+          </a:p>
+        </p:txBody>
+      </p:sp>
+      <p:sp>
+        <p:nvSpPr>
+          <p:cNvPr id="7" name="TextBox 6"/>
+          <p:cNvSpPr txBox="1"/>
+          <p:nvPr/>
+        </p:nvSpPr>
+        <p:spPr>
+          <a:xfrm>
+            <a:off x="777240" y="5641848"/>
+            <a:ext cx="8321040" cy="411480"/>
+          </a:xfrm>
+          <a:prstGeom prst="rect">
+            <a:avLst/>
+          </a:prstGeom>
+          <a:noFill/>
+        </p:spPr>
+        <p:txBody>
+          <a:bodyPr wrap="square">
             <a:spAutoFit/>
           </a:bodyPr>
           <a:lstStyle/>
           <a:p>
-            <a:pPr algn="l"/>
-            <a:r>
-              <a:rPr sz="2000" b="1">
+            <a:pPr algn="ctr">
+              <a:defRPr sz="1500" i="1">
                 <a:solidFill>
                   <a:srgbClr val="1F4E79"/>
                 </a:solidFill>
-                <a:latin typeface="Arial"/>
-              </a:rPr>
-              <a:t>ServiciosYa – Plataforma digital de conexión y gestión de servicios</a:t>
-            </a:r>
-          </a:p>
-        </p:txBody>
-      </p:sp>
-      <p:sp>
-        <p:nvSpPr>
-          <p:cNvPr id="4" name="TextBox 3"/>
-          <p:cNvSpPr txBox="1"/>
-          <p:nvPr/>
-        </p:nvSpPr>
-        <p:spPr>
-          <a:xfrm>
-            <a:off x="777240" y="1996156"/>
-            <a:ext cx="7589520" cy="4861844"/>
-          </a:xfrm>
-          <a:prstGeom prst="rect">
-            <a:avLst/>
-          </a:prstGeom>
-          <a:noFill/>
-          <a:ln>
-            <a:noFill/>
-          </a:ln>
-        </p:spPr>
-        <p:txBody>
-          <a:bodyPr wrap="square" lIns="73152" tIns="27432" rIns="45720" bIns="27432">
-            <a:spAutoFit/>
-          </a:bodyPr>
-          <a:lstStyle/>
-          <a:p>
-            <a:pPr>
-              <a:spcAft>
-                <a:spcPts val="800"/>
-              </a:spcAft>
+              </a:defRPr>
             </a:pPr>
             <a:r>
-              <a:rPr sz="1850" dirty="0">
-                <a:solidFill>
-                  <a:srgbClr val="202020"/>
-                </a:solidFill>
-                <a:latin typeface="Arial"/>
-              </a:rPr>
-              <a:t>• </a:t>
-            </a:r>
-            <a:r>
-              <a:rPr sz="1850" dirty="0" err="1">
-                <a:solidFill>
-                  <a:srgbClr val="202020"/>
-                </a:solidFill>
-                <a:latin typeface="Arial"/>
-              </a:rPr>
-              <a:t>Conectar</a:t>
-            </a:r>
-            <a:r>
-              <a:rPr sz="1850" dirty="0">
-                <a:solidFill>
-                  <a:srgbClr val="202020"/>
-                </a:solidFill>
-                <a:latin typeface="Arial"/>
-              </a:rPr>
-              <a:t> a personas </a:t>
-            </a:r>
-            <a:r>
-              <a:rPr sz="1850" dirty="0" err="1">
-                <a:solidFill>
-                  <a:srgbClr val="202020"/>
-                </a:solidFill>
-                <a:latin typeface="Arial"/>
-              </a:rPr>
-              <a:t>que</a:t>
-            </a:r>
-            <a:r>
-              <a:rPr sz="1850" dirty="0">
-                <a:solidFill>
-                  <a:srgbClr val="202020"/>
-                </a:solidFill>
-                <a:latin typeface="Arial"/>
-              </a:rPr>
-              <a:t> </a:t>
-            </a:r>
-            <a:r>
-              <a:rPr sz="1850" dirty="0" err="1">
-                <a:solidFill>
-                  <a:srgbClr val="202020"/>
-                </a:solidFill>
-                <a:latin typeface="Arial"/>
-              </a:rPr>
-              <a:t>necesitan</a:t>
-            </a:r>
-            <a:r>
-              <a:rPr sz="1850" dirty="0">
-                <a:solidFill>
-                  <a:srgbClr val="202020"/>
-                </a:solidFill>
-                <a:latin typeface="Arial"/>
-              </a:rPr>
-              <a:t> </a:t>
-            </a:r>
-            <a:r>
-              <a:rPr sz="1850" dirty="0" err="1">
-                <a:solidFill>
-                  <a:srgbClr val="202020"/>
-                </a:solidFill>
-                <a:latin typeface="Arial"/>
-              </a:rPr>
-              <a:t>realizar</a:t>
-            </a:r>
-            <a:r>
-              <a:rPr sz="1850" dirty="0">
-                <a:solidFill>
-                  <a:srgbClr val="202020"/>
-                </a:solidFill>
-                <a:latin typeface="Arial"/>
-              </a:rPr>
-              <a:t> un </a:t>
-            </a:r>
-            <a:r>
-              <a:rPr sz="1850" dirty="0" err="1">
-                <a:solidFill>
-                  <a:srgbClr val="202020"/>
-                </a:solidFill>
-                <a:latin typeface="Arial"/>
-              </a:rPr>
-              <a:t>trabajo</a:t>
-            </a:r>
-            <a:r>
-              <a:rPr sz="1850" dirty="0">
-                <a:solidFill>
-                  <a:srgbClr val="202020"/>
-                </a:solidFill>
-                <a:latin typeface="Arial"/>
-              </a:rPr>
-              <a:t> o </a:t>
-            </a:r>
-            <a:r>
-              <a:rPr sz="1850" dirty="0" err="1">
-                <a:solidFill>
-                  <a:srgbClr val="202020"/>
-                </a:solidFill>
-                <a:latin typeface="Arial"/>
-              </a:rPr>
-              <a:t>servicio</a:t>
-            </a:r>
-            <a:r>
-              <a:rPr sz="1850" dirty="0">
-                <a:solidFill>
-                  <a:srgbClr val="202020"/>
-                </a:solidFill>
-                <a:latin typeface="Arial"/>
-              </a:rPr>
-              <a:t> con </a:t>
-            </a:r>
-            <a:r>
-              <a:rPr sz="1850" dirty="0" err="1">
-                <a:solidFill>
-                  <a:srgbClr val="202020"/>
-                </a:solidFill>
-                <a:latin typeface="Arial"/>
-              </a:rPr>
-              <a:t>usuarios</a:t>
-            </a:r>
-            <a:r>
-              <a:rPr sz="1850" dirty="0">
-                <a:solidFill>
-                  <a:srgbClr val="202020"/>
-                </a:solidFill>
-                <a:latin typeface="Arial"/>
-              </a:rPr>
-              <a:t> </a:t>
-            </a:r>
-            <a:r>
-              <a:rPr sz="1850" dirty="0" err="1">
-                <a:solidFill>
-                  <a:srgbClr val="202020"/>
-                </a:solidFill>
-                <a:latin typeface="Arial"/>
-              </a:rPr>
-              <a:t>interesados</a:t>
-            </a:r>
-            <a:r>
-              <a:rPr sz="1850" dirty="0">
-                <a:solidFill>
-                  <a:srgbClr val="202020"/>
-                </a:solidFill>
-                <a:latin typeface="Arial"/>
-              </a:rPr>
-              <a:t> </a:t>
-            </a:r>
-            <a:r>
-              <a:rPr sz="1850" dirty="0" err="1">
-                <a:solidFill>
-                  <a:srgbClr val="202020"/>
-                </a:solidFill>
-                <a:latin typeface="Arial"/>
-              </a:rPr>
-              <a:t>en</a:t>
-            </a:r>
-            <a:r>
-              <a:rPr sz="1850" dirty="0">
-                <a:solidFill>
-                  <a:srgbClr val="202020"/>
-                </a:solidFill>
-                <a:latin typeface="Arial"/>
-              </a:rPr>
-              <a:t> </a:t>
-            </a:r>
-            <a:r>
-              <a:rPr sz="1850" dirty="0" err="1">
-                <a:solidFill>
-                  <a:srgbClr val="202020"/>
-                </a:solidFill>
-                <a:latin typeface="Arial"/>
-              </a:rPr>
-              <a:t>ejecutarlo</a:t>
-            </a:r>
-            <a:r>
-              <a:rPr sz="1850" dirty="0">
-                <a:solidFill>
-                  <a:srgbClr val="202020"/>
-                </a:solidFill>
-                <a:latin typeface="Arial"/>
-              </a:rPr>
-              <a:t>.</a:t>
-            </a:r>
-            <a:endParaRPr lang="es-ES" sz="1850" dirty="0">
-              <a:solidFill>
-                <a:srgbClr val="202020"/>
-              </a:solidFill>
-              <a:latin typeface="Arial"/>
-            </a:endParaRPr>
-          </a:p>
-          <a:p>
-            <a:pPr>
-              <a:spcAft>
-                <a:spcPts val="800"/>
-              </a:spcAft>
-            </a:pPr>
-            <a:endParaRPr sz="1850" dirty="0">
-              <a:solidFill>
-                <a:srgbClr val="202020"/>
-              </a:solidFill>
-              <a:latin typeface="Arial"/>
-            </a:endParaRPr>
-          </a:p>
-          <a:p>
-            <a:pPr>
-              <a:spcAft>
-                <a:spcPts val="800"/>
-              </a:spcAft>
-            </a:pPr>
-            <a:r>
-              <a:rPr sz="1850" dirty="0">
-                <a:solidFill>
-                  <a:srgbClr val="202020"/>
-                </a:solidFill>
-                <a:latin typeface="Arial"/>
-              </a:rPr>
-              <a:t>• </a:t>
-            </a:r>
-            <a:r>
-              <a:rPr sz="1850" dirty="0" err="1">
-                <a:solidFill>
-                  <a:srgbClr val="202020"/>
-                </a:solidFill>
-                <a:latin typeface="Arial"/>
-              </a:rPr>
-              <a:t>Permitirá</a:t>
-            </a:r>
-            <a:r>
-              <a:rPr sz="1850" dirty="0">
-                <a:solidFill>
-                  <a:srgbClr val="202020"/>
-                </a:solidFill>
-                <a:latin typeface="Arial"/>
-              </a:rPr>
-              <a:t> </a:t>
-            </a:r>
-            <a:r>
-              <a:rPr sz="1850" dirty="0" err="1">
-                <a:solidFill>
-                  <a:srgbClr val="202020"/>
-                </a:solidFill>
-                <a:latin typeface="Arial"/>
-              </a:rPr>
-              <a:t>registrarse</a:t>
-            </a:r>
-            <a:r>
-              <a:rPr sz="1850" dirty="0">
-                <a:solidFill>
-                  <a:srgbClr val="202020"/>
-                </a:solidFill>
-                <a:latin typeface="Arial"/>
-              </a:rPr>
-              <a:t>, </a:t>
-            </a:r>
-            <a:r>
-              <a:rPr sz="1850" dirty="0" err="1">
-                <a:solidFill>
-                  <a:srgbClr val="202020"/>
-                </a:solidFill>
-                <a:latin typeface="Arial"/>
-              </a:rPr>
-              <a:t>gestionar</a:t>
-            </a:r>
-            <a:r>
-              <a:rPr sz="1850" dirty="0">
-                <a:solidFill>
-                  <a:srgbClr val="202020"/>
-                </a:solidFill>
-                <a:latin typeface="Arial"/>
-              </a:rPr>
-              <a:t> </a:t>
-            </a:r>
-            <a:r>
-              <a:rPr sz="1850" dirty="0" err="1">
-                <a:solidFill>
-                  <a:srgbClr val="202020"/>
-                </a:solidFill>
-                <a:latin typeface="Arial"/>
-              </a:rPr>
-              <a:t>perfiles</a:t>
-            </a:r>
-            <a:r>
-              <a:rPr sz="1850" dirty="0">
-                <a:solidFill>
-                  <a:srgbClr val="202020"/>
-                </a:solidFill>
-                <a:latin typeface="Arial"/>
-              </a:rPr>
-              <a:t>, </a:t>
-            </a:r>
-            <a:r>
-              <a:rPr sz="1850" dirty="0" err="1">
-                <a:solidFill>
-                  <a:srgbClr val="202020"/>
-                </a:solidFill>
-                <a:latin typeface="Arial"/>
-              </a:rPr>
-              <a:t>publicar</a:t>
-            </a:r>
-            <a:r>
-              <a:rPr sz="1850" dirty="0">
-                <a:solidFill>
-                  <a:srgbClr val="202020"/>
-                </a:solidFill>
-                <a:latin typeface="Arial"/>
-              </a:rPr>
-              <a:t> solicitudes, </a:t>
-            </a:r>
-            <a:r>
-              <a:rPr sz="1850" dirty="0" err="1">
-                <a:solidFill>
-                  <a:srgbClr val="202020"/>
-                </a:solidFill>
-                <a:latin typeface="Arial"/>
-              </a:rPr>
-              <a:t>visualizar</a:t>
-            </a:r>
-            <a:r>
-              <a:rPr sz="1850" dirty="0">
-                <a:solidFill>
-                  <a:srgbClr val="202020"/>
-                </a:solidFill>
-                <a:latin typeface="Arial"/>
-              </a:rPr>
-              <a:t> </a:t>
-            </a:r>
-            <a:r>
-              <a:rPr sz="1850" dirty="0" err="1">
-                <a:solidFill>
-                  <a:srgbClr val="202020"/>
-                </a:solidFill>
-                <a:latin typeface="Arial"/>
-              </a:rPr>
-              <a:t>oportunidades</a:t>
-            </a:r>
-            <a:r>
-              <a:rPr sz="1850" dirty="0">
-                <a:solidFill>
-                  <a:srgbClr val="202020"/>
-                </a:solidFill>
-                <a:latin typeface="Arial"/>
-              </a:rPr>
-              <a:t> y </a:t>
-            </a:r>
-            <a:r>
-              <a:rPr sz="1850" dirty="0" err="1">
-                <a:solidFill>
-                  <a:srgbClr val="202020"/>
-                </a:solidFill>
-                <a:latin typeface="Arial"/>
-              </a:rPr>
-              <a:t>postular</a:t>
-            </a:r>
-            <a:r>
-              <a:rPr sz="1850" dirty="0">
-                <a:solidFill>
-                  <a:srgbClr val="202020"/>
-                </a:solidFill>
-                <a:latin typeface="Arial"/>
-              </a:rPr>
-              <a:t> a </a:t>
-            </a:r>
-            <a:r>
-              <a:rPr sz="1850" dirty="0" err="1">
-                <a:solidFill>
-                  <a:srgbClr val="202020"/>
-                </a:solidFill>
-                <a:latin typeface="Arial"/>
-              </a:rPr>
-              <a:t>trabajos</a:t>
-            </a:r>
-            <a:r>
-              <a:rPr sz="1850" dirty="0">
-                <a:solidFill>
-                  <a:srgbClr val="202020"/>
-                </a:solidFill>
-                <a:latin typeface="Arial"/>
-              </a:rPr>
-              <a:t>.</a:t>
-            </a:r>
-            <a:endParaRPr lang="es-ES" sz="1850" dirty="0">
-              <a:solidFill>
-                <a:srgbClr val="202020"/>
-              </a:solidFill>
-              <a:latin typeface="Arial"/>
-            </a:endParaRPr>
-          </a:p>
-          <a:p>
-            <a:pPr>
-              <a:spcAft>
-                <a:spcPts val="800"/>
-              </a:spcAft>
-            </a:pPr>
-            <a:endParaRPr sz="1850" dirty="0">
-              <a:solidFill>
-                <a:srgbClr val="202020"/>
-              </a:solidFill>
-              <a:latin typeface="Arial"/>
-            </a:endParaRPr>
-          </a:p>
-          <a:p>
-            <a:pPr>
-              <a:spcAft>
-                <a:spcPts val="800"/>
-              </a:spcAft>
-            </a:pPr>
-            <a:r>
-              <a:rPr sz="1850" dirty="0">
-                <a:solidFill>
-                  <a:srgbClr val="202020"/>
-                </a:solidFill>
-                <a:latin typeface="Arial"/>
-              </a:rPr>
-              <a:t>• El </a:t>
-            </a:r>
-            <a:r>
-              <a:rPr sz="1850" dirty="0" err="1">
-                <a:solidFill>
-                  <a:srgbClr val="202020"/>
-                </a:solidFill>
-                <a:latin typeface="Arial"/>
-              </a:rPr>
-              <a:t>solicitante</a:t>
-            </a:r>
-            <a:r>
-              <a:rPr sz="1850" dirty="0">
-                <a:solidFill>
-                  <a:srgbClr val="202020"/>
-                </a:solidFill>
-                <a:latin typeface="Arial"/>
-              </a:rPr>
-              <a:t> </a:t>
-            </a:r>
-            <a:r>
-              <a:rPr sz="1850" dirty="0" err="1">
-                <a:solidFill>
-                  <a:srgbClr val="202020"/>
-                </a:solidFill>
-                <a:latin typeface="Arial"/>
-              </a:rPr>
-              <a:t>podrá</a:t>
-            </a:r>
-            <a:r>
-              <a:rPr sz="1850" dirty="0">
-                <a:solidFill>
-                  <a:srgbClr val="202020"/>
-                </a:solidFill>
-                <a:latin typeface="Arial"/>
-              </a:rPr>
-              <a:t> </a:t>
-            </a:r>
-            <a:r>
-              <a:rPr sz="1850" dirty="0" err="1">
-                <a:solidFill>
-                  <a:srgbClr val="202020"/>
-                </a:solidFill>
-                <a:latin typeface="Arial"/>
-              </a:rPr>
-              <a:t>revisar</a:t>
-            </a:r>
-            <a:r>
-              <a:rPr sz="1850" dirty="0">
-                <a:solidFill>
-                  <a:srgbClr val="202020"/>
-                </a:solidFill>
-                <a:latin typeface="Arial"/>
-              </a:rPr>
-              <a:t> </a:t>
-            </a:r>
-            <a:r>
-              <a:rPr sz="1850" dirty="0" err="1">
-                <a:solidFill>
-                  <a:srgbClr val="202020"/>
-                </a:solidFill>
-                <a:latin typeface="Arial"/>
-              </a:rPr>
-              <a:t>postulaciones</a:t>
-            </a:r>
-            <a:r>
-              <a:rPr sz="1850" dirty="0">
-                <a:solidFill>
-                  <a:srgbClr val="202020"/>
-                </a:solidFill>
-                <a:latin typeface="Arial"/>
-              </a:rPr>
-              <a:t>, </a:t>
-            </a:r>
-            <a:r>
-              <a:rPr sz="1850" dirty="0" err="1">
-                <a:solidFill>
-                  <a:srgbClr val="202020"/>
-                </a:solidFill>
-                <a:latin typeface="Arial"/>
-              </a:rPr>
-              <a:t>seleccionar</a:t>
-            </a:r>
-            <a:r>
-              <a:rPr sz="1850" dirty="0">
-                <a:solidFill>
-                  <a:srgbClr val="202020"/>
-                </a:solidFill>
-                <a:latin typeface="Arial"/>
-              </a:rPr>
-              <a:t> a </a:t>
-            </a:r>
-            <a:r>
-              <a:rPr sz="1850" dirty="0" err="1">
-                <a:solidFill>
-                  <a:srgbClr val="202020"/>
-                </a:solidFill>
-                <a:latin typeface="Arial"/>
-              </a:rPr>
-              <a:t>una</a:t>
-            </a:r>
-            <a:r>
-              <a:rPr sz="1850" dirty="0">
-                <a:solidFill>
-                  <a:srgbClr val="202020"/>
-                </a:solidFill>
-                <a:latin typeface="Arial"/>
-              </a:rPr>
-              <a:t> persona y </a:t>
-            </a:r>
-            <a:r>
-              <a:rPr sz="1850" dirty="0" err="1">
-                <a:solidFill>
-                  <a:srgbClr val="202020"/>
-                </a:solidFill>
-                <a:latin typeface="Arial"/>
-              </a:rPr>
-              <a:t>realizar</a:t>
-            </a:r>
-            <a:r>
-              <a:rPr sz="1850" dirty="0">
-                <a:solidFill>
-                  <a:srgbClr val="202020"/>
-                </a:solidFill>
-                <a:latin typeface="Arial"/>
-              </a:rPr>
-              <a:t> </a:t>
-            </a:r>
-            <a:r>
-              <a:rPr sz="1850" dirty="0" err="1">
-                <a:solidFill>
-                  <a:srgbClr val="202020"/>
-                </a:solidFill>
-                <a:latin typeface="Arial"/>
-              </a:rPr>
-              <a:t>seguimiento</a:t>
-            </a:r>
-            <a:r>
-              <a:rPr sz="1850" dirty="0">
-                <a:solidFill>
-                  <a:srgbClr val="202020"/>
-                </a:solidFill>
-                <a:latin typeface="Arial"/>
-              </a:rPr>
-              <a:t> del </a:t>
-            </a:r>
-            <a:r>
-              <a:rPr sz="1850" dirty="0" err="1">
-                <a:solidFill>
-                  <a:srgbClr val="202020"/>
-                </a:solidFill>
-                <a:latin typeface="Arial"/>
-              </a:rPr>
-              <a:t>servicio</a:t>
-            </a:r>
-            <a:r>
-              <a:rPr sz="1850" dirty="0">
-                <a:solidFill>
-                  <a:srgbClr val="202020"/>
-                </a:solidFill>
-                <a:latin typeface="Arial"/>
-              </a:rPr>
-              <a:t>.</a:t>
-            </a:r>
-            <a:endParaRPr lang="es-ES" sz="1850" dirty="0">
-              <a:solidFill>
-                <a:srgbClr val="202020"/>
-              </a:solidFill>
-              <a:latin typeface="Arial"/>
-            </a:endParaRPr>
-          </a:p>
-          <a:p>
-            <a:pPr>
-              <a:spcAft>
-                <a:spcPts val="800"/>
-              </a:spcAft>
-            </a:pPr>
-            <a:endParaRPr sz="1850" dirty="0">
-              <a:solidFill>
-                <a:srgbClr val="202020"/>
-              </a:solidFill>
-              <a:latin typeface="Arial"/>
-            </a:endParaRPr>
-          </a:p>
-          <a:p>
-            <a:pPr>
-              <a:spcAft>
-                <a:spcPts val="800"/>
-              </a:spcAft>
-            </a:pPr>
-            <a:r>
-              <a:rPr sz="1850" dirty="0">
-                <a:solidFill>
-                  <a:srgbClr val="202020"/>
-                </a:solidFill>
-                <a:latin typeface="Arial"/>
-              </a:rPr>
-              <a:t>• </a:t>
-            </a:r>
-            <a:r>
-              <a:rPr sz="1850" dirty="0" err="1">
-                <a:solidFill>
-                  <a:srgbClr val="202020"/>
-                </a:solidFill>
-                <a:latin typeface="Arial"/>
-              </a:rPr>
-              <a:t>Incluirá</a:t>
-            </a:r>
-            <a:r>
-              <a:rPr sz="1850" dirty="0">
-                <a:solidFill>
-                  <a:srgbClr val="202020"/>
-                </a:solidFill>
-                <a:latin typeface="Arial"/>
-              </a:rPr>
-              <a:t> </a:t>
-            </a:r>
-            <a:r>
-              <a:rPr sz="1850" dirty="0" err="1">
-                <a:solidFill>
-                  <a:srgbClr val="202020"/>
-                </a:solidFill>
-                <a:latin typeface="Arial"/>
-              </a:rPr>
-              <a:t>categorías</a:t>
-            </a:r>
-            <a:r>
-              <a:rPr sz="1850" dirty="0">
-                <a:solidFill>
-                  <a:srgbClr val="202020"/>
-                </a:solidFill>
-                <a:latin typeface="Arial"/>
-              </a:rPr>
-              <a:t>, </a:t>
-            </a:r>
-            <a:r>
-              <a:rPr sz="1850" dirty="0" err="1">
-                <a:solidFill>
-                  <a:srgbClr val="202020"/>
-                </a:solidFill>
-                <a:latin typeface="Arial"/>
-              </a:rPr>
-              <a:t>filtros</a:t>
-            </a:r>
-            <a:r>
-              <a:rPr sz="1850" dirty="0">
-                <a:solidFill>
-                  <a:srgbClr val="202020"/>
-                </a:solidFill>
-                <a:latin typeface="Arial"/>
-              </a:rPr>
-              <a:t> de </a:t>
-            </a:r>
-            <a:r>
-              <a:rPr sz="1850" dirty="0" err="1">
-                <a:solidFill>
-                  <a:srgbClr val="202020"/>
-                </a:solidFill>
-                <a:latin typeface="Arial"/>
-              </a:rPr>
-              <a:t>búsqueda</a:t>
-            </a:r>
-            <a:r>
-              <a:rPr sz="1850" dirty="0">
-                <a:solidFill>
-                  <a:srgbClr val="202020"/>
-                </a:solidFill>
-                <a:latin typeface="Arial"/>
-              </a:rPr>
-              <a:t>, </a:t>
-            </a:r>
-            <a:r>
-              <a:rPr sz="1850" dirty="0" err="1">
-                <a:solidFill>
-                  <a:srgbClr val="202020"/>
-                </a:solidFill>
-                <a:latin typeface="Arial"/>
-              </a:rPr>
-              <a:t>calificaciones</a:t>
-            </a:r>
-            <a:r>
-              <a:rPr sz="1850" dirty="0">
-                <a:solidFill>
-                  <a:srgbClr val="202020"/>
-                </a:solidFill>
-                <a:latin typeface="Arial"/>
-              </a:rPr>
-              <a:t> y </a:t>
-            </a:r>
-            <a:r>
-              <a:rPr sz="1850" dirty="0" err="1">
-                <a:solidFill>
-                  <a:srgbClr val="202020"/>
-                </a:solidFill>
-                <a:latin typeface="Arial"/>
-              </a:rPr>
-              <a:t>comentarios</a:t>
-            </a:r>
-            <a:r>
-              <a:rPr sz="1850" dirty="0">
-                <a:solidFill>
-                  <a:srgbClr val="202020"/>
-                </a:solidFill>
-                <a:latin typeface="Arial"/>
-              </a:rPr>
-              <a:t> para </a:t>
-            </a:r>
-            <a:r>
-              <a:rPr sz="1850" dirty="0" err="1">
-                <a:solidFill>
-                  <a:srgbClr val="202020"/>
-                </a:solidFill>
-                <a:latin typeface="Arial"/>
-              </a:rPr>
-              <a:t>mejorar</a:t>
-            </a:r>
-            <a:r>
-              <a:rPr sz="1850" dirty="0">
-                <a:solidFill>
-                  <a:srgbClr val="202020"/>
-                </a:solidFill>
-                <a:latin typeface="Arial"/>
-              </a:rPr>
-              <a:t> la </a:t>
-            </a:r>
-            <a:r>
-              <a:rPr sz="1850" dirty="0" err="1">
-                <a:solidFill>
-                  <a:srgbClr val="202020"/>
-                </a:solidFill>
-                <a:latin typeface="Arial"/>
-              </a:rPr>
-              <a:t>organización</a:t>
-            </a:r>
-            <a:r>
-              <a:rPr sz="1850" dirty="0">
-                <a:solidFill>
-                  <a:srgbClr val="202020"/>
-                </a:solidFill>
-                <a:latin typeface="Arial"/>
-              </a:rPr>
-              <a:t> y confianza.</a:t>
-            </a:r>
-            <a:endParaRPr lang="es-ES" sz="1850" dirty="0">
-              <a:solidFill>
-                <a:srgbClr val="202020"/>
-              </a:solidFill>
-              <a:latin typeface="Arial"/>
-            </a:endParaRPr>
-          </a:p>
-          <a:p>
-            <a:pPr>
-              <a:spcAft>
-                <a:spcPts val="800"/>
-              </a:spcAft>
-            </a:pPr>
-            <a:endParaRPr sz="1850" dirty="0">
-              <a:solidFill>
-                <a:srgbClr val="202020"/>
-              </a:solidFill>
-              <a:latin typeface="Arial"/>
-            </a:endParaRPr>
-          </a:p>
-          <a:p>
-            <a:pPr>
-              <a:spcAft>
-                <a:spcPts val="800"/>
-              </a:spcAft>
-            </a:pPr>
-            <a:r>
-              <a:rPr sz="1850" dirty="0">
-                <a:solidFill>
-                  <a:srgbClr val="202020"/>
-                </a:solidFill>
-                <a:latin typeface="Arial"/>
-              </a:rPr>
-              <a:t>• La </a:t>
-            </a:r>
-            <a:r>
-              <a:rPr sz="1850" dirty="0" err="1">
-                <a:solidFill>
-                  <a:srgbClr val="202020"/>
-                </a:solidFill>
-                <a:latin typeface="Arial"/>
-              </a:rPr>
-              <a:t>solución</a:t>
-            </a:r>
-            <a:r>
-              <a:rPr sz="1850" dirty="0">
-                <a:solidFill>
-                  <a:srgbClr val="202020"/>
-                </a:solidFill>
-                <a:latin typeface="Arial"/>
-              </a:rPr>
-              <a:t> </a:t>
-            </a:r>
-            <a:r>
-              <a:rPr sz="1850" dirty="0" err="1">
-                <a:solidFill>
-                  <a:srgbClr val="202020"/>
-                </a:solidFill>
-                <a:latin typeface="Arial"/>
-              </a:rPr>
-              <a:t>integrará</a:t>
-            </a:r>
-            <a:r>
-              <a:rPr sz="1850" dirty="0">
-                <a:solidFill>
-                  <a:srgbClr val="202020"/>
-                </a:solidFill>
-                <a:latin typeface="Arial"/>
-              </a:rPr>
-              <a:t> </a:t>
-            </a:r>
-            <a:r>
-              <a:rPr sz="1850" dirty="0" err="1">
-                <a:solidFill>
-                  <a:srgbClr val="202020"/>
-                </a:solidFill>
-                <a:latin typeface="Arial"/>
-              </a:rPr>
-              <a:t>aplicación</a:t>
-            </a:r>
-            <a:r>
-              <a:rPr sz="1850" dirty="0">
-                <a:solidFill>
-                  <a:srgbClr val="202020"/>
-                </a:solidFill>
-                <a:latin typeface="Arial"/>
-              </a:rPr>
-              <a:t> </a:t>
-            </a:r>
-            <a:r>
-              <a:rPr sz="1850" dirty="0" err="1">
-                <a:solidFill>
-                  <a:srgbClr val="202020"/>
-                </a:solidFill>
-                <a:latin typeface="Arial"/>
-              </a:rPr>
-              <a:t>móvil</a:t>
-            </a:r>
-            <a:r>
-              <a:rPr sz="1850" dirty="0">
-                <a:solidFill>
-                  <a:srgbClr val="202020"/>
-                </a:solidFill>
-                <a:latin typeface="Arial"/>
-              </a:rPr>
-              <a:t>, </a:t>
-            </a:r>
-            <a:r>
-              <a:rPr sz="1850" dirty="0" err="1">
-                <a:solidFill>
-                  <a:srgbClr val="202020"/>
-                </a:solidFill>
-                <a:latin typeface="Arial"/>
-              </a:rPr>
-              <a:t>plataforma</a:t>
-            </a:r>
-            <a:r>
-              <a:rPr sz="1850" dirty="0">
-                <a:solidFill>
-                  <a:srgbClr val="202020"/>
-                </a:solidFill>
-                <a:latin typeface="Arial"/>
-              </a:rPr>
-              <a:t> web, backend y base de </a:t>
-            </a:r>
-            <a:r>
-              <a:rPr sz="1850" dirty="0" err="1">
-                <a:solidFill>
-                  <a:srgbClr val="202020"/>
-                </a:solidFill>
-                <a:latin typeface="Arial"/>
-              </a:rPr>
-              <a:t>datos</a:t>
-            </a:r>
-            <a:r>
-              <a:rPr sz="1850" dirty="0">
-                <a:solidFill>
-                  <a:srgbClr val="202020"/>
-                </a:solidFill>
-                <a:latin typeface="Arial"/>
-              </a:rPr>
-              <a:t> </a:t>
-            </a:r>
-            <a:r>
-              <a:rPr sz="1850" dirty="0" err="1">
-                <a:solidFill>
-                  <a:srgbClr val="202020"/>
-                </a:solidFill>
-                <a:latin typeface="Arial"/>
-              </a:rPr>
-              <a:t>centralizada</a:t>
-            </a:r>
-            <a:r>
-              <a:rPr sz="1850" dirty="0">
-                <a:solidFill>
-                  <a:srgbClr val="202020"/>
-                </a:solidFill>
-                <a:latin typeface="Arial"/>
-              </a:rPr>
-              <a:t>.</a:t>
+              <a:t>La propuesta busca centralizar y ordenar el proceso de búsqueda, oferta y gestión de servicios.</a:t>
             </a:r>
           </a:p>
         </p:txBody>
